--- a/public/fun/pack/pptx/birthdaypro/돌잔치프리미엄_13_사진중심_오팔펄.pptx
+++ b/public/fun/pack/pptx/birthdaypro/돌잔치프리미엄_13_사진중심_오팔펄.pptx
@@ -112,12 +112,12 @@
   <p:extLst>
     <p:ext uri="{521415D9-36F7-43E2-AB2F-B90AF26B5E84}">
       <p14:sectionLst xmlns:p14="http://schemas.microsoft.com/office/powerpoint/2010/main">
-        <p14:section name="시작" id="{056BFD69-87CB-40B4-8254-6378BBAA3DC5}">
+        <p14:section name="시작" id="{D6617FF0-C3C0-43BB-A9DE-BB4DBEC7569E}">
           <p14:sldIdLst>
             <p14:sldId id="256"/>
           </p14:sldIdLst>
         </p14:section>
-        <p14:section name="본문" id="{459189D2-DAAC-4BBD-9998-B2FE87E0A77F}">
+        <p14:section name="본문" id="{3EB96D7B-0109-474F-9D05-2B8671CBEBBD}">
           <p14:sldIdLst>
             <p14:sldId id="257"/>
             <p14:sldId id="258"/>
@@ -125,7 +125,7 @@
             <p14:sldId id="260"/>
           </p14:sldIdLst>
         </p14:section>
-        <p14:section name="마무리" id="{BAEAD84B-B08C-4836-A05D-BCAFEB9BD9E3}">
+        <p14:section name="마무리" id="{EE8DDF0E-348F-48AA-81D5-6E8D4B59A874}">
           <p14:sldIdLst>
             <p14:sldId id="261"/>
           </p14:sldIdLst>
@@ -2778,7 +2778,7 @@
             </a:lvl1pPr>
           </a:lstStyle>
           <a:p>
-            <a:fld id="{C2AA3927-A761-439C-972B-469D05CF9025}" type="slidenum">
+            <a:fld id="{73A83F6F-6974-41B9-85E5-777A26CB9167}" type="slidenum">
               <a:rPr lang="en-US"/>
               <a:t>‹#›</a:t>
             </a:fld>
@@ -4830,7 +4830,7 @@
             </a:lvl1pPr>
           </a:lstStyle>
           <a:p>
-            <a:fld id="{AD95A95D-BA3C-44E1-B4CD-BC9BFFBBB3FF}" type="slidenum">
+            <a:fld id="{38B094C7-2DDC-4C42-8765-EBE155FA5E2E}" type="slidenum">
               <a:rPr lang="en-US"/>
               <a:t>‹#›</a:t>
             </a:fld>
@@ -5579,7 +5579,7 @@
             </a:lvl1pPr>
           </a:lstStyle>
           <a:p>
-            <a:fld id="{9DA55CC2-4234-425D-8B60-F32B1CF7A389}" type="slidenum">
+            <a:fld id="{6DFF0843-6D8F-4BFC-8D4F-B79855D3091C}" type="slidenum">
               <a:rPr lang="en-US"/>
               <a:t>‹#›</a:t>
             </a:fld>
@@ -6464,7 +6464,7 @@
           <a:p>
             <a:r>
               <a:rPr lang="ko-KR"/>
-              <a:t>아기 이름 · 0000. 00. 00</a:t>
+              <a:t>아기 이름 · 날짜 입력</a:t>
             </a:r>
           </a:p>
           <a:p>
@@ -6647,7 +6647,7 @@
           <a:bodyPr/>
           <a:lstStyle/>
           <a:p>
-            <a:fld id="{4CE6B0F5-B0AC-41F2-B7C4-CEB340D333B5}" type="slidenum">
+            <a:fld id="{DF037A71-04D7-409E-9415-AC2089F16ED9}" type="slidenum">
               <a:rPr lang="en-US"/>
               <a:t>‹#›</a:t>
             </a:fld>
@@ -7409,7 +7409,7 @@
           <a:bodyPr/>
           <a:lstStyle/>
           <a:p>
-            <a:fld id="{F637E0DB-B71A-4A3D-947D-D753FBD6801D}" type="slidenum">
+            <a:fld id="{D475F990-4020-406E-B051-F5FD2EC30AED}" type="slidenum">
               <a:rPr lang="en-US"/>
               <a:t>‹#›</a:t>
             </a:fld>
@@ -7519,7 +7519,7 @@
           <a:bodyPr/>
           <a:lstStyle/>
           <a:p>
-            <a:fld id="{17A7CE69-79D1-4AC9-98A4-006338F276F8}" type="slidenum">
+            <a:fld id="{EB4C9B81-9A06-4608-B4AD-4766F0C9A145}" type="slidenum">
               <a:rPr lang="en-US"/>
               <a:t>‹#›</a:t>
             </a:fld>
@@ -8985,7 +8985,7 @@
           <a:bodyPr/>
           <a:lstStyle/>
           <a:p>
-            <a:fld id="{471412A6-0B31-4839-9465-73F7840DF14A}" type="slidenum">
+            <a:fld id="{27C001BA-5259-4B49-8586-2CD398D30AEB}" type="slidenum">
               <a:rPr lang="en-US"/>
               <a:t>‹#›</a:t>
             </a:fld>
